--- a/decks/geog-glaciers/geog-glaciers_ch5_deposition-landforms.pptx
+++ b/decks/geog-glaciers/geog-glaciers_ch5_deposition-landforms.pptx
@@ -126,37 +126,37 @@
   <p:extLst>
     <p:ext uri="{521415D9-36F7-43E2-AB2F-B90AF26B5E84}">
       <p14:sectionLst xmlns:p14="http://schemas.microsoft.com/office/powerpoint/2010/main">
-        <p14:section name="Opening" id="{7248eb79-1f07-6988-9f9f-3c66f5da7b6b}">
+        <p14:section name="Opening" id="{72593c51-4ab2-fa40-e104-2e0d18fb73bb}">
           <p14:sldIdLst>
             <p14:sldId id="256"/>
           </p14:sldIdLst>
         </p14:section>
-        <p14:section name="Gate" id="{c65cbf25-84cf-3590-df7c-ba1242c3d730}">
+        <p14:section name="Gate" id="{d986d77c-e286-0de5-d5d5-e15c1bb71003}">
           <p14:sldIdLst>
             <p14:sldId id="257"/>
             <p14:sldId id="258"/>
           </p14:sldIdLst>
         </p14:section>
-        <p14:section name="Pre-teach" id="{75327f24-3d82-54c1-65d7-0c0be963070d}">
+        <p14:section name="Pre-teach" id="{bef6a96f-1cf7-d724-0452-369cc61ae169}">
           <p14:sldIdLst>
             <p14:sldId id="259"/>
             <p14:sldId id="260"/>
           </p14:sldIdLst>
         </p14:section>
-        <p14:section name="Read-along" id="{ba3b443f-d37b-c3c6-6fb4-fc08bebbb7e6}">
+        <p14:section name="Read-along" id="{fb2723b9-a570-d867-1145-e837d681ba38}">
           <p14:sldIdLst>
             <p14:sldId id="261"/>
             <p14:sldId id="262"/>
           </p14:sldIdLst>
         </p14:section>
-        <p14:section name="Teach" id="{75fb9351-1bc9-cf1f-33d8-6728492076ea}">
+        <p14:section name="Teach" id="{e1266693-a280-aed2-5f98-aaa1d668c1ee}">
           <p14:sldIdLst>
             <p14:sldId id="263"/>
             <p14:sldId id="264"/>
             <p14:sldId id="265"/>
           </p14:sldIdLst>
         </p14:section>
-        <p14:section name="Routes" id="{651e48b6-0fe7-5ed7-ea5d-ab2be0ac23df}">
+        <p14:section name="Routes" id="{b6c71a18-44a5-23e6-66bd-3c3d5a096609}">
           <p14:sldIdLst>
             <p14:sldId id="266"/>
             <p14:sldId id="267"/>
@@ -166,12 +166,12 @@
             <p14:sldId id="271"/>
           </p14:sldIdLst>
         </p14:section>
-        <p14:section name="Close" id="{f22e43dc-799e-2e9d-edaa-90d4f60ce7a3}">
+        <p14:section name="Close" id="{979290ea-14a8-18e6-c9c9-c4eafa68aa83}">
           <p14:sldIdLst>
             <p14:sldId id="272"/>
           </p14:sldIdLst>
         </p14:section>
-        <p14:section name="Answers" id="{73b5f1ad-8830-13e1-924f-e864bcf9c784}">
+        <p14:section name="Answers" id="{c9cf18b5-a6ce-ce25-9aa3-fb92da7394a5}">
           <p14:sldIdLst>
             <p14:sldId id="273"/>
             <p14:sldId id="274"/>
